--- a/assets/pptx/catalog-664.pptx
+++ b/assets/pptx/catalog-664.pptx
@@ -3248,7 +3248,7 @@
                 <a:ea typeface="Ebrima"/>
                 <a:cs typeface="Ebrima"/>
               </a:rPr>
-              <a:t>አዝ ሳቅ ሳቅ (2x) ሳቅ አድርጐልኛል</a:t>
+              <a:t>አዝ ሳቅ ሳቅ 2x ሳቅ አድርጐልኛል</a:t>
             </a:r>
           </a:p>
           <a:p>
@@ -3266,7 +3266,7 @@
                 <a:ea typeface="Ebrima"/>
                 <a:cs typeface="Ebrima"/>
               </a:rPr>
-              <a:t>ሳቅ (3x) ሳቅ በሳቅ ሆኖልኛል</a:t>
+              <a:t>ሳቅ 3x ሳቅ በሳቅ ሆኖልኛል</a:t>
             </a:r>
           </a:p>
           <a:p>
@@ -3302,7 +3302,7 @@
                 <a:ea typeface="Ebrima"/>
                 <a:cs typeface="Ebrima"/>
               </a:rPr>
-              <a:t>አምላኬ አስቦልኛል ኪዳኑን አጽንቶልኛል (2x)</a:t>
+              <a:t>አምላኬ አስቦልኛል ኪዳኑን አጽንቶልኛል 2x</a:t>
             </a:r>
           </a:p>
         </p:txBody>
@@ -3423,7 +3423,7 @@
                 <a:ea typeface="Ebrima"/>
                 <a:cs typeface="Ebrima"/>
               </a:rPr>
-              <a:t>ሰጠኝ እንደልቤ ደስ አለኝ በአምላኬ (2x)</a:t>
+              <a:t>ሰጠኝ እንደልቤ ደስ አለኝ በአምላኬ 2x</a:t>
             </a:r>
           </a:p>
         </p:txBody>
@@ -3490,7 +3490,7 @@
                 <a:ea typeface="Ebrima"/>
                 <a:cs typeface="Ebrima"/>
               </a:rPr>
-              <a:t>አዝ ሳቅ ሳቅ (2x) ሳቅ አድርጐልኛል</a:t>
+              <a:t>አዝ ሳቅ ሳቅ 2x ሳቅ አድርጐልኛል</a:t>
             </a:r>
           </a:p>
           <a:p>
@@ -3508,7 +3508,7 @@
                 <a:ea typeface="Ebrima"/>
                 <a:cs typeface="Ebrima"/>
               </a:rPr>
-              <a:t>ሳቅ (3x) ሳቅ በሳቅ ሆኖልኛል</a:t>
+              <a:t>ሳቅ 3x ሳቅ በሳቅ ሆኖልኛል</a:t>
             </a:r>
           </a:p>
           <a:p>
@@ -3665,7 +3665,7 @@
                 <a:ea typeface="Ebrima"/>
                 <a:cs typeface="Ebrima"/>
               </a:rPr>
-              <a:t>የተከሰስኩበት/ተታማሁበት) ሆነልኝ ለሹመት (2x)</a:t>
+              <a:t>የተከሰስኩበት/ተታማሁበት ሆነልኝ ለሹመት 2x</a:t>
             </a:r>
           </a:p>
         </p:txBody>
@@ -3732,7 +3732,7 @@
                 <a:ea typeface="Ebrima"/>
                 <a:cs typeface="Ebrima"/>
               </a:rPr>
-              <a:t>አዝ ሳቅ ሳቅ (2x) ሳቅ አድርጐልኛል</a:t>
+              <a:t>አዝ ሳቅ ሳቅ 2x ሳቅ አድርጐልኛል</a:t>
             </a:r>
           </a:p>
           <a:p>
@@ -3750,7 +3750,7 @@
                 <a:ea typeface="Ebrima"/>
                 <a:cs typeface="Ebrima"/>
               </a:rPr>
-              <a:t>ሳቅ (3x) ሳቅ በሳቅ ሆኖልኛል</a:t>
+              <a:t>ሳቅ 3x ሳቅ በሳቅ ሆኖልኛል</a:t>
             </a:r>
           </a:p>
           <a:p>
@@ -3907,7 +3907,7 @@
                 <a:ea typeface="Ebrima"/>
                 <a:cs typeface="Ebrima"/>
               </a:rPr>
-              <a:t>የማይሰማ የለም እግዚአብሔር ሲናገር (2x)</a:t>
+              <a:t>የማይሰማ የለም እግዚአብሔር ሲናገር 2x</a:t>
             </a:r>
           </a:p>
         </p:txBody>
@@ -3974,7 +3974,7 @@
                 <a:ea typeface="Ebrima"/>
                 <a:cs typeface="Ebrima"/>
               </a:rPr>
-              <a:t>አዝ ሳቅ ሳቅ (2x) ሳቅ አድርጐልኛል</a:t>
+              <a:t>አዝ ሳቅ ሳቅ 2x ሳቅ አድርጐልኛል</a:t>
             </a:r>
           </a:p>
           <a:p>
@@ -3992,7 +3992,7 @@
                 <a:ea typeface="Ebrima"/>
                 <a:cs typeface="Ebrima"/>
               </a:rPr>
-              <a:t>ሳቅ (3x) ሳቅ በሳቅ ሆኖልኛል</a:t>
+              <a:t>ሳቅ 3x ሳቅ በሳቅ ሆኖልኛል</a:t>
             </a:r>
           </a:p>
           <a:p>
@@ -4028,7 +4028,7 @@
                 <a:ea typeface="Ebrima"/>
                 <a:cs typeface="Ebrima"/>
               </a:rPr>
-              <a:t>አምላኬ አስቦልኛል ኪዳኑን አጽንቶልኛል (2x)</a:t>
+              <a:t>አምላኬ አስቦልኛል ኪዳኑን አጽንቶልኛል 2x</a:t>
             </a:r>
           </a:p>
         </p:txBody>
@@ -4113,7 +4113,7 @@
                 <a:ea typeface="Ebrima"/>
                 <a:cs typeface="Ebrima"/>
               </a:rPr>
-              <a:t>አምላኬ አስቦልኛል ኪዳኑን አጽንቶልኛል (4x)</a:t>
+              <a:t>አምላኬ አስቦልኛል ኪዳኑን አጽንቶልኛል 4x</a:t>
             </a:r>
           </a:p>
         </p:txBody>
